--- a/chainsaw.pptx
+++ b/chainsaw.pptx
@@ -268,7 +268,7 @@
           <a:lstStyle/>
           <a:p>
             <a:fld id="{16286276-9013-2A43-82D1-BA4685C95117}" type="datetimeFigureOut">
-              <a:t>10/15/22</a:t>
+              <a:t>10/16/22</a:t>
             </a:fld>
             <a:endParaRPr lang="en-US"/>
           </a:p>
@@ -464,7 +464,7 @@
           <a:lstStyle/>
           <a:p>
             <a:fld id="{16286276-9013-2A43-82D1-BA4685C95117}" type="datetimeFigureOut">
-              <a:t>10/15/22</a:t>
+              <a:t>10/16/22</a:t>
             </a:fld>
             <a:endParaRPr lang="en-US"/>
           </a:p>
@@ -670,7 +670,7 @@
           <a:lstStyle/>
           <a:p>
             <a:fld id="{16286276-9013-2A43-82D1-BA4685C95117}" type="datetimeFigureOut">
-              <a:t>10/15/22</a:t>
+              <a:t>10/16/22</a:t>
             </a:fld>
             <a:endParaRPr lang="en-US"/>
           </a:p>
@@ -866,7 +866,7 @@
           <a:lstStyle/>
           <a:p>
             <a:fld id="{16286276-9013-2A43-82D1-BA4685C95117}" type="datetimeFigureOut">
-              <a:t>10/15/22</a:t>
+              <a:t>10/16/22</a:t>
             </a:fld>
             <a:endParaRPr lang="en-US"/>
           </a:p>
@@ -1139,7 +1139,7 @@
           <a:lstStyle/>
           <a:p>
             <a:fld id="{16286276-9013-2A43-82D1-BA4685C95117}" type="datetimeFigureOut">
-              <a:t>10/15/22</a:t>
+              <a:t>10/16/22</a:t>
             </a:fld>
             <a:endParaRPr lang="en-US"/>
           </a:p>
@@ -1402,7 +1402,7 @@
           <a:lstStyle/>
           <a:p>
             <a:fld id="{16286276-9013-2A43-82D1-BA4685C95117}" type="datetimeFigureOut">
-              <a:t>10/15/22</a:t>
+              <a:t>10/16/22</a:t>
             </a:fld>
             <a:endParaRPr lang="en-US"/>
           </a:p>
@@ -1812,7 +1812,7 @@
           <a:lstStyle/>
           <a:p>
             <a:fld id="{16286276-9013-2A43-82D1-BA4685C95117}" type="datetimeFigureOut">
-              <a:t>10/15/22</a:t>
+              <a:t>10/16/22</a:t>
             </a:fld>
             <a:endParaRPr lang="en-US"/>
           </a:p>
@@ -1951,7 +1951,7 @@
           <a:lstStyle/>
           <a:p>
             <a:fld id="{16286276-9013-2A43-82D1-BA4685C95117}" type="datetimeFigureOut">
-              <a:t>10/15/22</a:t>
+              <a:t>10/16/22</a:t>
             </a:fld>
             <a:endParaRPr lang="en-US"/>
           </a:p>
@@ -2062,7 +2062,7 @@
           <a:lstStyle/>
           <a:p>
             <a:fld id="{16286276-9013-2A43-82D1-BA4685C95117}" type="datetimeFigureOut">
-              <a:t>10/15/22</a:t>
+              <a:t>10/16/22</a:t>
             </a:fld>
             <a:endParaRPr lang="en-US"/>
           </a:p>
@@ -2371,7 +2371,7 @@
           <a:lstStyle/>
           <a:p>
             <a:fld id="{16286276-9013-2A43-82D1-BA4685C95117}" type="datetimeFigureOut">
-              <a:t>10/15/22</a:t>
+              <a:t>10/16/22</a:t>
             </a:fld>
             <a:endParaRPr lang="en-US"/>
           </a:p>
@@ -2657,7 +2657,7 @@
           <a:lstStyle/>
           <a:p>
             <a:fld id="{16286276-9013-2A43-82D1-BA4685C95117}" type="datetimeFigureOut">
-              <a:t>10/15/22</a:t>
+              <a:t>10/16/22</a:t>
             </a:fld>
             <a:endParaRPr lang="en-US"/>
           </a:p>
@@ -2896,7 +2896,7 @@
           </a:lstStyle>
           <a:p>
             <a:fld id="{16286276-9013-2A43-82D1-BA4685C95117}" type="datetimeFigureOut">
-              <a:t>10/15/22</a:t>
+              <a:t>10/16/22</a:t>
             </a:fld>
             <a:endParaRPr lang="en-US"/>
           </a:p>
@@ -3620,7 +3620,7 @@
         </p:blipFill>
         <p:spPr>
           <a:xfrm>
-            <a:off x="2099733" y="4493492"/>
+            <a:off x="1728008" y="4823993"/>
             <a:ext cx="2317750" cy="1419832"/>
           </a:xfrm>
           <a:prstGeom prst="rect">
@@ -3642,7 +3642,7 @@
         </p:nvSpPr>
         <p:spPr>
           <a:xfrm>
-            <a:off x="6321528" y="5311129"/>
+            <a:off x="7566434" y="5426977"/>
             <a:ext cx="1738683" cy="738664"/>
           </a:xfrm>
           <a:prstGeom prst="rect">
@@ -3766,8 +3766,8 @@
         </p:nvSpPr>
         <p:spPr>
           <a:xfrm>
-            <a:off x="275862" y="4726355"/>
-            <a:ext cx="1823871" cy="954107"/>
+            <a:off x="63773" y="4519036"/>
+            <a:ext cx="1557867" cy="1815882"/>
           </a:xfrm>
           <a:prstGeom prst="rect">
             <a:avLst/>
@@ -3780,52 +3780,49 @@
           </a:bodyPr>
           <a:lstStyle/>
           <a:p>
-            <a:r>
-              <a:rPr lang="en-US" sz="1400" b="0" i="0">
-                <a:solidFill>
-                  <a:srgbClr val="0F1111"/>
-                </a:solidFill>
-                <a:effectLst/>
-                <a:latin typeface="Amazon Ember"/>
-              </a:rPr>
-              <a:t>72 DL = 72 </a:t>
-            </a:r>
             <a:r>
               <a:rPr lang="en-US" sz="1400" b="1" i="0">
                 <a:solidFill>
                   <a:srgbClr val="FF0000"/>
                 </a:solidFill>
                 <a:effectLst/>
-                <a:latin typeface="Amazon Ember"/>
               </a:rPr>
               <a:t>Drive Links </a:t>
             </a:r>
-            <a:r>
-              <a:rPr lang="en-US" sz="1400" b="0" i="0">
-                <a:solidFill>
-                  <a:srgbClr val="0F1111"/>
-                </a:solidFill>
-                <a:effectLst/>
-                <a:latin typeface="Amazon Ember"/>
-              </a:rPr>
-              <a:t>(</a:t>
-            </a:r>
+          </a:p>
+          <a:p>
             <a:r>
               <a:rPr lang="en-US" sz="1400" b="0" i="0">
                 <a:solidFill>
                   <a:srgbClr val="3D3D3C"/>
                 </a:solidFill>
                 <a:effectLst/>
-                <a:latin typeface="Roboto" panose="02000000000000000000" pitchFamily="2" charset="0"/>
               </a:rPr>
               <a:t>little teeth on the underside of the chain</a:t>
+            </a:r>
+          </a:p>
+          <a:p>
+            <a:endParaRPr lang="en-US" sz="1400">
+              <a:solidFill>
+                <a:srgbClr val="3D3D3C"/>
+              </a:solidFill>
+            </a:endParaRPr>
+          </a:p>
+          <a:p>
+            <a:r>
+              <a:rPr lang="en-US" sz="1400" b="0" i="0">
+                <a:solidFill>
+                  <a:srgbClr val="3D3D3C"/>
+                </a:solidFill>
+                <a:effectLst/>
+              </a:rPr>
+              <a:t>72DL means that the chain has 72 of them</a:t>
             </a:r>
             <a:endParaRPr lang="en-US" sz="1400" b="0" i="0">
               <a:solidFill>
                 <a:srgbClr val="0F1111"/>
               </a:solidFill>
               <a:effectLst/>
-              <a:latin typeface="Amazon Ember"/>
             </a:endParaRPr>
           </a:p>
         </p:txBody>
@@ -3857,7 +3854,7 @@
         </p:blipFill>
         <p:spPr bwMode="auto">
           <a:xfrm>
-            <a:off x="8060211" y="4618771"/>
+            <a:off x="9305117" y="4734619"/>
             <a:ext cx="2773802" cy="2123381"/>
           </a:xfrm>
           <a:prstGeom prst="rect">
@@ -3920,6 +3917,88 @@
           </a:extLst>
         </p:spPr>
       </p:pic>
+      <p:sp>
+        <p:nvSpPr>
+          <p:cNvPr id="2" name="TextBox 1">
+            <a:extLst>
+              <a:ext uri="{FF2B5EF4-FFF2-40B4-BE49-F238E27FC236}">
+                <a16:creationId xmlns:a16="http://schemas.microsoft.com/office/drawing/2014/main" id="{A814A63E-02AD-CE74-DD7C-9CB91D251C38}"/>
+              </a:ext>
+            </a:extLst>
+          </p:cNvPr>
+          <p:cNvSpPr txBox="1"/>
+          <p:nvPr/>
+        </p:nvSpPr>
+        <p:spPr>
+          <a:xfrm>
+            <a:off x="4796010" y="3433058"/>
+            <a:ext cx="2599980" cy="1384995"/>
+          </a:xfrm>
+          <a:prstGeom prst="rect">
+            <a:avLst/>
+          </a:prstGeom>
+          <a:solidFill>
+            <a:schemeClr val="accent4">
+              <a:lumMod val="20000"/>
+              <a:lumOff val="80000"/>
+            </a:schemeClr>
+          </a:solidFill>
+          <a:ln>
+            <a:solidFill>
+              <a:srgbClr val="FF0000"/>
+            </a:solidFill>
+          </a:ln>
+        </p:spPr>
+        <p:txBody>
+          <a:bodyPr wrap="square" rtlCol="0">
+            <a:spAutoFit/>
+          </a:bodyPr>
+          <a:lstStyle/>
+          <a:p>
+            <a:pPr marL="285750" indent="-285750">
+              <a:buFont typeface="Arial" panose="020B0604020202020204" pitchFamily="34" charset="0"/>
+              <a:buChar char="•"/>
+            </a:pPr>
+            <a:r>
+              <a:rPr lang="en-US" sz="1400" b="1">
+                <a:solidFill>
+                  <a:srgbClr val="FF0000"/>
+                </a:solidFill>
+              </a:rPr>
+              <a:t>low profile</a:t>
+            </a:r>
+            <a:r>
+              <a:rPr lang="en-US" sz="1400"/>
+              <a:t> chain has shorter cutters than standard chain</a:t>
+            </a:r>
+          </a:p>
+          <a:p>
+            <a:pPr marL="285750" indent="-285750">
+              <a:buFont typeface="Arial" panose="020B0604020202020204" pitchFamily="34" charset="0"/>
+              <a:buChar char="•"/>
+            </a:pPr>
+            <a:endParaRPr lang="en-US" sz="1400"/>
+          </a:p>
+          <a:p>
+            <a:pPr marL="285750" indent="-285750">
+              <a:buFont typeface="Arial" panose="020B0604020202020204" pitchFamily="34" charset="0"/>
+              <a:buChar char="•"/>
+            </a:pPr>
+            <a:r>
+              <a:rPr lang="en-US" sz="1400" b="1">
+                <a:solidFill>
+                  <a:srgbClr val="FF0000"/>
+                </a:solidFill>
+              </a:rPr>
+              <a:t>narrow kerf</a:t>
+            </a:r>
+            <a:r>
+              <a:rPr lang="en-US" sz="1400"/>
+              <a:t> chain has narrower cutters than standard chain</a:t>
+            </a:r>
+          </a:p>
+        </p:txBody>
+      </p:sp>
     </p:spTree>
     <p:extLst>
       <p:ext uri="{BB962C8B-B14F-4D97-AF65-F5344CB8AC3E}">
@@ -5214,7 +5293,7 @@
         <p:spPr>
           <a:xfrm>
             <a:off x="214099" y="664637"/>
-            <a:ext cx="8161283" cy="2031325"/>
+            <a:ext cx="5757043" cy="2031325"/>
           </a:xfrm>
           <a:prstGeom prst="rect">
             <a:avLst/>
@@ -5382,8 +5461,329 @@
         </p:blipFill>
         <p:spPr>
           <a:xfrm>
-            <a:off x="8792559" y="403027"/>
+            <a:off x="3650255" y="1533114"/>
             <a:ext cx="2226833" cy="1026190"/>
+          </a:xfrm>
+          <a:prstGeom prst="rect">
+            <a:avLst/>
+          </a:prstGeom>
+        </p:spPr>
+      </p:pic>
+      <p:sp>
+        <p:nvSpPr>
+          <p:cNvPr id="4" name="TextBox 3">
+            <a:extLst>
+              <a:ext uri="{FF2B5EF4-FFF2-40B4-BE49-F238E27FC236}">
+                <a16:creationId xmlns:a16="http://schemas.microsoft.com/office/drawing/2014/main" id="{AE3CE76B-AF76-A3D6-DDB2-72C26EF3C7DB}"/>
+              </a:ext>
+            </a:extLst>
+          </p:cNvPr>
+          <p:cNvSpPr txBox="1"/>
+          <p:nvPr/>
+        </p:nvSpPr>
+        <p:spPr>
+          <a:xfrm>
+            <a:off x="135272" y="2778750"/>
+            <a:ext cx="6676845" cy="3970318"/>
+          </a:xfrm>
+          <a:prstGeom prst="rect">
+            <a:avLst/>
+          </a:prstGeom>
+          <a:solidFill>
+            <a:schemeClr val="accent4">
+              <a:lumMod val="20000"/>
+              <a:lumOff val="80000"/>
+            </a:schemeClr>
+          </a:solidFill>
+          <a:ln>
+            <a:solidFill>
+              <a:srgbClr val="FF0000"/>
+            </a:solidFill>
+          </a:ln>
+        </p:spPr>
+        <p:txBody>
+          <a:bodyPr wrap="square" rtlCol="0">
+            <a:spAutoFit/>
+          </a:bodyPr>
+          <a:lstStyle/>
+          <a:p>
+            <a:r>
+              <a:rPr lang="en-US" sz="1400"/>
+              <a:t>Some examples of electric chainsaws (in 2020):</a:t>
+            </a:r>
+          </a:p>
+          <a:p>
+            <a:r>
+              <a:rPr lang="en-US" sz="1400"/>
+              <a:t> - https://www.youtube.com/watch?v=_aBZt8m1XkQ</a:t>
+            </a:r>
+          </a:p>
+          <a:p>
+            <a:r>
+              <a:rPr lang="en-US" sz="1400"/>
+              <a:t> - https://www.youtube.com/watch?v=9WDaTwEwhTk</a:t>
+            </a:r>
+          </a:p>
+          <a:p>
+            <a:r>
+              <a:rPr lang="en-US" sz="1400"/>
+              <a:t>=============BEST===================</a:t>
+            </a:r>
+          </a:p>
+          <a:p>
+            <a:r>
+              <a:rPr lang="en-US" sz="1400" b="1">
+                <a:solidFill>
+                  <a:srgbClr val="FF0000"/>
+                </a:solidFill>
+              </a:rPr>
+              <a:t>ECHO</a:t>
+            </a:r>
+            <a:r>
+              <a:rPr lang="en-US" sz="1400"/>
+              <a:t>: </a:t>
+            </a:r>
+            <a:r>
+              <a:rPr lang="en-US" sz="1400">
+                <a:hlinkClick r:id="rId3"/>
+              </a:rPr>
+              <a:t>https://amzn.to/37d9KRh</a:t>
+            </a:r>
+            <a:r>
+              <a:rPr lang="en-US" sz="1400"/>
+              <a:t> - </a:t>
+            </a:r>
+            <a:r>
+              <a:rPr lang="en-US" sz="1400">
+                <a:solidFill>
+                  <a:srgbClr val="00B050"/>
+                </a:solidFill>
+              </a:rPr>
+              <a:t>$395 for 16", now $300 for 18" at HomeDepot</a:t>
+            </a:r>
+          </a:p>
+          <a:p>
+            <a:r>
+              <a:rPr lang="en-US" sz="1400" b="1">
+                <a:solidFill>
+                  <a:srgbClr val="FF0000"/>
+                </a:solidFill>
+              </a:rPr>
+              <a:t>DeWalt</a:t>
+            </a:r>
+            <a:r>
+              <a:rPr lang="en-US" sz="1400"/>
+              <a:t>: </a:t>
+            </a:r>
+            <a:r>
+              <a:rPr lang="en-US" sz="1400">
+                <a:hlinkClick r:id="rId4"/>
+              </a:rPr>
+              <a:t>https://amzn.to/3AhA0oM</a:t>
+            </a:r>
+            <a:r>
+              <a:rPr lang="en-US" sz="1400"/>
+              <a:t>    </a:t>
+            </a:r>
+            <a:r>
+              <a:rPr lang="en-US" sz="1400">
+                <a:solidFill>
+                  <a:srgbClr val="00B050"/>
+                </a:solidFill>
+              </a:rPr>
+              <a:t>$330 </a:t>
+            </a:r>
+            <a:r>
+              <a:rPr lang="en-US" sz="1400" b="0" i="0">
+                <a:solidFill>
+                  <a:srgbClr val="00B050"/>
+                </a:solidFill>
+                <a:effectLst/>
+              </a:rPr>
+              <a:t>DEWALT FLEXVOLT Chainsaw 60V 2Ah 16IN</a:t>
+            </a:r>
+            <a:endParaRPr lang="en-US" sz="1400">
+              <a:solidFill>
+                <a:srgbClr val="00B050"/>
+              </a:solidFill>
+            </a:endParaRPr>
+          </a:p>
+          <a:p>
+            <a:r>
+              <a:rPr lang="en-US" sz="1400"/>
+              <a:t>=============Others===================</a:t>
+            </a:r>
+          </a:p>
+          <a:p>
+            <a:r>
+              <a:rPr lang="en-US" sz="1400"/>
+              <a:t>Milwaukee: https://amzn.to/35tPTeF      $450</a:t>
+            </a:r>
+          </a:p>
+          <a:p>
+            <a:r>
+              <a:rPr lang="en-US" sz="1400"/>
+              <a:t>Makita: https://amzn.to/37I9hqX - $409, 16"</a:t>
+            </a:r>
+          </a:p>
+          <a:p>
+            <a:r>
+              <a:rPr lang="en-US" sz="1400"/>
+              <a:t>Ryobi: https://amzn.to/2G0HGWG</a:t>
+            </a:r>
+          </a:p>
+          <a:p>
+            <a:r>
+              <a:rPr lang="en-US" sz="1400"/>
+              <a:t>Worx: https://amzn.to/3kqHbEk</a:t>
+            </a:r>
+          </a:p>
+          <a:p>
+            <a:r>
+              <a:rPr lang="en-US" sz="1400"/>
+              <a:t>EGO: https://amzn.to/3gNXDxh - $270, 14"</a:t>
+            </a:r>
+          </a:p>
+          <a:p>
+            <a:r>
+              <a:rPr lang="en-US" sz="1400"/>
+              <a:t>Oregon: https://amzn.to/3n91B61 – $378, 16"</a:t>
+            </a:r>
+          </a:p>
+          <a:p>
+            <a:r>
+              <a:rPr lang="en-US" sz="1400"/>
+              <a:t>WEN: https://amzn.to/3oEkONk</a:t>
+            </a:r>
+          </a:p>
+          <a:p>
+            <a:r>
+              <a:rPr lang="en-US" sz="1400"/>
+              <a:t>Husqvarna: https://amzn.to/2JWMqyk  $230, 14"</a:t>
+            </a:r>
+          </a:p>
+          <a:p>
+            <a:r>
+              <a:rPr lang="en-US" sz="1400"/>
+              <a:t>Stihl</a:t>
+            </a:r>
+          </a:p>
+          <a:p>
+            <a:r>
+              <a:rPr lang="en-US" sz="1400"/>
+              <a:t>Greenworks</a:t>
+            </a:r>
+          </a:p>
+          <a:p>
+            <a:r>
+              <a:rPr lang="en-US" sz="1400"/>
+              <a:t>Harbor Freight Atlas 80V 18"</a:t>
+            </a:r>
+          </a:p>
+        </p:txBody>
+      </p:sp>
+      <p:pic>
+        <p:nvPicPr>
+          <p:cNvPr id="7" name="Picture 6">
+            <a:extLst>
+              <a:ext uri="{FF2B5EF4-FFF2-40B4-BE49-F238E27FC236}">
+                <a16:creationId xmlns:a16="http://schemas.microsoft.com/office/drawing/2014/main" id="{CB4AE951-A637-2625-A2C1-4F7C199837EB}"/>
+              </a:ext>
+            </a:extLst>
+          </p:cNvPr>
+          <p:cNvPicPr>
+            <a:picLocks noChangeAspect="1"/>
+          </p:cNvPicPr>
+          <p:nvPr/>
+        </p:nvPicPr>
+        <p:blipFill>
+          <a:blip r:embed="rId5" cstate="email">
+            <a:extLst>
+              <a:ext uri="{28A0092B-C50C-407E-A947-70E740481C1C}">
+                <a14:useLocalDpi xmlns:a14="http://schemas.microsoft.com/office/drawing/2010/main"/>
+              </a:ext>
+            </a:extLst>
+          </a:blip>
+          <a:stretch>
+            <a:fillRect/>
+          </a:stretch>
+        </p:blipFill>
+        <p:spPr>
+          <a:xfrm>
+            <a:off x="8685527" y="4941977"/>
+            <a:ext cx="3506473" cy="1916023"/>
+          </a:xfrm>
+          <a:prstGeom prst="rect">
+            <a:avLst/>
+          </a:prstGeom>
+        </p:spPr>
+      </p:pic>
+      <p:pic>
+        <p:nvPicPr>
+          <p:cNvPr id="10" name="Picture 9">
+            <a:extLst>
+              <a:ext uri="{FF2B5EF4-FFF2-40B4-BE49-F238E27FC236}">
+                <a16:creationId xmlns:a16="http://schemas.microsoft.com/office/drawing/2014/main" id="{7B0B752C-46FA-0F15-3994-3A8ACF298CBA}"/>
+              </a:ext>
+            </a:extLst>
+          </p:cNvPr>
+          <p:cNvPicPr>
+            <a:picLocks noChangeAspect="1"/>
+          </p:cNvPicPr>
+          <p:nvPr/>
+        </p:nvPicPr>
+        <p:blipFill>
+          <a:blip r:embed="rId6" cstate="email">
+            <a:extLst>
+              <a:ext uri="{28A0092B-C50C-407E-A947-70E740481C1C}">
+                <a14:useLocalDpi xmlns:a14="http://schemas.microsoft.com/office/drawing/2010/main"/>
+              </a:ext>
+            </a:extLst>
+          </a:blip>
+          <a:stretch>
+            <a:fillRect/>
+          </a:stretch>
+        </p:blipFill>
+        <p:spPr>
+          <a:xfrm>
+            <a:off x="7384783" y="2046209"/>
+            <a:ext cx="4807217" cy="2765582"/>
+          </a:xfrm>
+          <a:prstGeom prst="rect">
+            <a:avLst/>
+          </a:prstGeom>
+        </p:spPr>
+      </p:pic>
+      <p:pic>
+        <p:nvPicPr>
+          <p:cNvPr id="6" name="Picture 5">
+            <a:extLst>
+              <a:ext uri="{FF2B5EF4-FFF2-40B4-BE49-F238E27FC236}">
+                <a16:creationId xmlns:a16="http://schemas.microsoft.com/office/drawing/2014/main" id="{3B9FE15E-A82D-47AB-AFE4-53F0B783057E}"/>
+              </a:ext>
+            </a:extLst>
+          </p:cNvPr>
+          <p:cNvPicPr>
+            <a:picLocks noChangeAspect="1"/>
+          </p:cNvPicPr>
+          <p:nvPr/>
+        </p:nvPicPr>
+        <p:blipFill>
+          <a:blip r:embed="rId7" cstate="email">
+            <a:extLst>
+              <a:ext uri="{28A0092B-C50C-407E-A947-70E740481C1C}">
+                <a14:useLocalDpi xmlns:a14="http://schemas.microsoft.com/office/drawing/2010/main"/>
+              </a:ext>
+            </a:extLst>
+          </a:blip>
+          <a:stretch>
+            <a:fillRect/>
+          </a:stretch>
+        </p:blipFill>
+        <p:spPr>
+          <a:xfrm>
+            <a:off x="4763671" y="5764760"/>
+            <a:ext cx="1890693" cy="857206"/>
           </a:xfrm>
           <a:prstGeom prst="rect">
             <a:avLst/>

--- a/chainsaw.pptx
+++ b/chainsaw.pptx
@@ -267,7 +267,7 @@
           <a:lstStyle/>
           <a:p>
             <a:fld id="{16286276-9013-2A43-82D1-BA4685C95117}" type="datetimeFigureOut">
-              <a:t>12/5/22</a:t>
+              <a:t>12/26/22</a:t>
             </a:fld>
             <a:endParaRPr lang="en-US"/>
           </a:p>
@@ -463,7 +463,7 @@
           <a:lstStyle/>
           <a:p>
             <a:fld id="{16286276-9013-2A43-82D1-BA4685C95117}" type="datetimeFigureOut">
-              <a:t>12/5/22</a:t>
+              <a:t>12/26/22</a:t>
             </a:fld>
             <a:endParaRPr lang="en-US"/>
           </a:p>
@@ -669,7 +669,7 @@
           <a:lstStyle/>
           <a:p>
             <a:fld id="{16286276-9013-2A43-82D1-BA4685C95117}" type="datetimeFigureOut">
-              <a:t>12/5/22</a:t>
+              <a:t>12/26/22</a:t>
             </a:fld>
             <a:endParaRPr lang="en-US"/>
           </a:p>
@@ -865,7 +865,7 @@
           <a:lstStyle/>
           <a:p>
             <a:fld id="{16286276-9013-2A43-82D1-BA4685C95117}" type="datetimeFigureOut">
-              <a:t>12/5/22</a:t>
+              <a:t>12/26/22</a:t>
             </a:fld>
             <a:endParaRPr lang="en-US"/>
           </a:p>
@@ -1138,7 +1138,7 @@
           <a:lstStyle/>
           <a:p>
             <a:fld id="{16286276-9013-2A43-82D1-BA4685C95117}" type="datetimeFigureOut">
-              <a:t>12/5/22</a:t>
+              <a:t>12/26/22</a:t>
             </a:fld>
             <a:endParaRPr lang="en-US"/>
           </a:p>
@@ -1401,7 +1401,7 @@
           <a:lstStyle/>
           <a:p>
             <a:fld id="{16286276-9013-2A43-82D1-BA4685C95117}" type="datetimeFigureOut">
-              <a:t>12/5/22</a:t>
+              <a:t>12/26/22</a:t>
             </a:fld>
             <a:endParaRPr lang="en-US"/>
           </a:p>
@@ -1811,7 +1811,7 @@
           <a:lstStyle/>
           <a:p>
             <a:fld id="{16286276-9013-2A43-82D1-BA4685C95117}" type="datetimeFigureOut">
-              <a:t>12/5/22</a:t>
+              <a:t>12/26/22</a:t>
             </a:fld>
             <a:endParaRPr lang="en-US"/>
           </a:p>
@@ -1950,7 +1950,7 @@
           <a:lstStyle/>
           <a:p>
             <a:fld id="{16286276-9013-2A43-82D1-BA4685C95117}" type="datetimeFigureOut">
-              <a:t>12/5/22</a:t>
+              <a:t>12/26/22</a:t>
             </a:fld>
             <a:endParaRPr lang="en-US"/>
           </a:p>
@@ -2061,7 +2061,7 @@
           <a:lstStyle/>
           <a:p>
             <a:fld id="{16286276-9013-2A43-82D1-BA4685C95117}" type="datetimeFigureOut">
-              <a:t>12/5/22</a:t>
+              <a:t>12/26/22</a:t>
             </a:fld>
             <a:endParaRPr lang="en-US"/>
           </a:p>
@@ -2370,7 +2370,7 @@
           <a:lstStyle/>
           <a:p>
             <a:fld id="{16286276-9013-2A43-82D1-BA4685C95117}" type="datetimeFigureOut">
-              <a:t>12/5/22</a:t>
+              <a:t>12/26/22</a:t>
             </a:fld>
             <a:endParaRPr lang="en-US"/>
           </a:p>
@@ -2656,7 +2656,7 @@
           <a:lstStyle/>
           <a:p>
             <a:fld id="{16286276-9013-2A43-82D1-BA4685C95117}" type="datetimeFigureOut">
-              <a:t>12/5/22</a:t>
+              <a:t>12/26/22</a:t>
             </a:fld>
             <a:endParaRPr lang="en-US"/>
           </a:p>
@@ -2895,7 +2895,7 @@
           </a:lstStyle>
           <a:p>
             <a:fld id="{16286276-9013-2A43-82D1-BA4685C95117}" type="datetimeFigureOut">
-              <a:t>12/5/22</a:t>
+              <a:t>12/26/22</a:t>
             </a:fld>
             <a:endParaRPr lang="en-US"/>
           </a:p>
@@ -4685,7 +4685,7 @@
           <a:lstStyle/>
           <a:p>
             <a:r>
-              <a:rPr lang="en-US" sz="1400"/>
+              <a:rPr lang="en-US" sz="1400" dirty="0"/>
               <a:t>July 2022 – bought:</a:t>
             </a:r>
           </a:p>
@@ -4695,7 +4695,7 @@
               <a:buChar char="•"/>
             </a:pPr>
             <a:r>
-              <a:rPr lang="en-US" sz="1400"/>
+              <a:rPr lang="en-US" sz="1400" dirty="0"/>
               <a:t>BLACK+DECKER 40V Max Cordless Chainsaw, 12-Inch (LCS1240), $219.00</a:t>
             </a:r>
           </a:p>
@@ -4705,25 +4705,25 @@
               <a:buChar char="•"/>
             </a:pPr>
             <a:r>
-              <a:rPr lang="en-US" sz="1400"/>
+              <a:rPr lang="en-US" sz="1400" dirty="0"/>
               <a:t>Replacement Oregon Chainsaw Chain for Black &amp; Decker LCS1240 </a:t>
             </a:r>
             <a:br>
-              <a:rPr lang="en-US" sz="1400"/>
+              <a:rPr lang="en-US" sz="1400" dirty="0"/>
             </a:br>
             <a:r>
-              <a:rPr lang="en-US" sz="1400"/>
+              <a:rPr lang="en-US" sz="1400" dirty="0"/>
               <a:t>40-volt Cordless Chainsaw, 12-Inch</a:t>
             </a:r>
             <a:br>
-              <a:rPr lang="en-US" sz="1400"/>
+              <a:rPr lang="en-US" sz="1400" dirty="0"/>
             </a:br>
             <a:r>
-              <a:rPr lang="en-US" sz="1400"/>
+              <a:rPr lang="en-US" sz="1400" dirty="0"/>
               <a:t>.. pitch </a:t>
             </a:r>
             <a:r>
-              <a:rPr lang="en-US" sz="1400" b="0" i="0">
+              <a:rPr lang="en-US" sz="1400" b="0" i="0" dirty="0">
                 <a:solidFill>
                   <a:srgbClr val="0F1111"/>
                 </a:solidFill>
@@ -4733,7 +4733,7 @@
               <a:t>3/8"</a:t>
             </a:r>
             <a:br>
-              <a:rPr lang="en-US" sz="1400" b="0" i="0">
+              <a:rPr lang="en-US" sz="1400" b="0" i="0" dirty="0">
                 <a:solidFill>
                   <a:srgbClr val="0F1111"/>
                 </a:solidFill>
@@ -4742,7 +4742,7 @@
               </a:rPr>
             </a:br>
             <a:r>
-              <a:rPr lang="en-US" sz="1400" b="0" i="0">
+              <a:rPr lang="en-US" sz="1400" b="0" i="0" dirty="0">
                 <a:solidFill>
                   <a:srgbClr val="0F1111"/>
                 </a:solidFill>
@@ -4752,7 +4752,7 @@
               <a:t>.. gauge .043"</a:t>
             </a:r>
             <a:br>
-              <a:rPr lang="en-US" sz="1400" b="0" i="0">
+              <a:rPr lang="en-US" sz="1400" b="0" i="0" dirty="0">
                 <a:solidFill>
                   <a:srgbClr val="0F1111"/>
                 </a:solidFill>
@@ -4761,7 +4761,7 @@
               </a:rPr>
             </a:br>
             <a:r>
-              <a:rPr lang="en-US" sz="1400" b="0" i="0">
+              <a:rPr lang="en-US" sz="1400" b="0" i="0" dirty="0">
                 <a:solidFill>
                   <a:srgbClr val="0F1111"/>
                 </a:solidFill>
@@ -4771,7 +4771,7 @@
               <a:t>.. 45 DL (Drive Links)</a:t>
             </a:r>
             <a:br>
-              <a:rPr lang="en-US" sz="1400" b="0" i="0">
+              <a:rPr lang="en-US" sz="1400" b="0" i="0" dirty="0">
                 <a:solidFill>
                   <a:srgbClr val="0F1111"/>
                 </a:solidFill>
@@ -4780,7 +4780,7 @@
               </a:rPr>
             </a:br>
             <a:r>
-              <a:rPr lang="en-US" sz="1400" b="0" i="0">
+              <a:rPr lang="en-US" sz="1400" b="0" i="0" dirty="0">
                 <a:solidFill>
                   <a:srgbClr val="0F1111"/>
                 </a:solidFill>
@@ -4790,7 +4790,7 @@
               <a:t>.. bar 12-inch</a:t>
             </a:r>
             <a:br>
-              <a:rPr lang="en-US" sz="1400" b="0" i="0">
+              <a:rPr lang="en-US" sz="1400" b="0" i="0" dirty="0">
                 <a:solidFill>
                   <a:srgbClr val="0F1111"/>
                 </a:solidFill>
@@ -4799,7 +4799,7 @@
               </a:rPr>
             </a:br>
             <a:r>
-              <a:rPr lang="en-US" sz="1400" b="0" i="0">
+              <a:rPr lang="en-US" sz="1400" b="0" i="0" dirty="0">
                 <a:solidFill>
                   <a:srgbClr val="0F1111"/>
                 </a:solidFill>
